--- a/decks/geog-weather-climate/geog-weather-climate_ch2_pressure-and-circulation.pptx
+++ b/decks/geog-weather-climate/geog-weather-climate_ch2_pressure-and-circulation.pptx
@@ -125,30 +125,30 @@
   <p:extLst>
     <p:ext uri="{521415D9-36F7-43E2-AB2F-B90AF26B5E84}">
       <p14:sectionLst xmlns:p14="http://schemas.microsoft.com/office/powerpoint/2010/main">
-        <p14:section name="Opening" id="{d69f0475-751d-4b82-655a-ac1de6a174cd}">
+        <p14:section name="Opening" id="{76e907ee-405c-73d2-a25f-c86adeb48e46}">
           <p14:sldIdLst>
             <p14:sldId id="256"/>
           </p14:sldIdLst>
         </p14:section>
-        <p14:section name="Gate" id="{c7b818ce-746a-2d72-ccf3-3e28d054d72e}">
+        <p14:section name="Gate" id="{e6fc538f-26a3-8741-b643-3e089ecc3bd3}">
           <p14:sldIdLst>
             <p14:sldId id="257"/>
             <p14:sldId id="258"/>
           </p14:sldIdLst>
         </p14:section>
-        <p14:section name="Pre-teach" id="{f4830a37-e82e-4496-58da-8b131af5adf6}">
+        <p14:section name="Pre-teach" id="{0bba5df1-bf71-d03d-0f2b-6baa3847c4a0}">
           <p14:sldIdLst>
             <p14:sldId id="259"/>
             <p14:sldId id="260"/>
           </p14:sldIdLst>
         </p14:section>
-        <p14:section name="Read-along" id="{ece7da8e-51b4-b8d8-f4ef-af9df5bb2716}">
+        <p14:section name="Read-along" id="{49683626-8c3d-4824-5ac0-f1b060611db5}">
           <p14:sldIdLst>
             <p14:sldId id="261"/>
             <p14:sldId id="262"/>
           </p14:sldIdLst>
         </p14:section>
-        <p14:section name="Teach" id="{41e93700-46de-6492-9a7a-d232f47a0a22}">
+        <p14:section name="Teach" id="{ef431e34-113d-2cbe-de94-35e8c1df4b83}">
           <p14:sldIdLst>
             <p14:sldId id="263"/>
             <p14:sldId id="264"/>
@@ -156,7 +156,7 @@
             <p14:sldId id="266"/>
           </p14:sldIdLst>
         </p14:section>
-        <p14:section name="Routes" id="{f9a0335a-6657-2740-1534-8dcb4715eae1}">
+        <p14:section name="Routes" id="{6128e296-9ff1-de3a-5bfd-92e36bcf0f24}">
           <p14:sldIdLst>
             <p14:sldId id="267"/>
             <p14:sldId id="268"/>
@@ -164,12 +164,12 @@
             <p14:sldId id="270"/>
           </p14:sldIdLst>
         </p14:section>
-        <p14:section name="Close" id="{08a7ad5e-3b3c-f7d8-3f2f-10c7796d1714}">
+        <p14:section name="Close" id="{5e13beea-68ca-e07c-2600-6ca67c545631}">
           <p14:sldIdLst>
             <p14:sldId id="271"/>
           </p14:sldIdLst>
         </p14:section>
-        <p14:section name="Answers" id="{a105706f-508f-31c5-badd-6d93c1db9ae2}">
+        <p14:section name="Answers" id="{08764580-d392-8a52-6d76-98a8b38a3cde}">
           <p14:sldIdLst>
             <p14:sldId id="272"/>
             <p14:sldId id="273"/>
